--- a/Publication/UP.02.pptx
+++ b/Publication/UP.02.pptx
@@ -110,7 +110,7 @@
   </p:defaultTextStyle>
   <p:extLst>
     <p:ext uri="{EFAFB233-063F-42B5-8137-9DF3F51BA10A}">
-      <p15:sldGuideLst xmlns:p15="http://schemas.microsoft.com/office/powerpoint/2012/main">
+      <p15:sldGuideLst xmlns="" xmlns:p15="http://schemas.microsoft.com/office/powerpoint/2012/main">
         <p15:guide id="1" orient="horz" pos="2160" userDrawn="1">
           <p15:clr>
             <a:srgbClr val="A4A3A4"/>
@@ -257,7 +257,7 @@
             <a:fld id="{1160EA64-D806-43AC-9DF2-F8C432F32B4C}" type="datetimeFigureOut">
               <a:rPr lang="en-US" smtClean="0"/>
               <a:pPr/>
-              <a:t>12/19/2025</a:t>
+              <a:t>12/20/2025</a:t>
             </a:fld>
             <a:endParaRPr lang="en-US" dirty="0"/>
           </a:p>
@@ -309,7 +309,7 @@
     </p:spTree>
     <p:extLst>
       <p:ext uri="{BB962C8B-B14F-4D97-AF65-F5344CB8AC3E}">
-        <p14:creationId xmlns:p14="http://schemas.microsoft.com/office/powerpoint/2010/main" val="2509752347"/>
+        <p14:creationId xmlns="" xmlns:p14="http://schemas.microsoft.com/office/powerpoint/2010/main" val="2509752347"/>
       </p:ext>
     </p:extLst>
   </p:cSld>
@@ -427,7 +427,7 @@
             <a:fld id="{E9F9C37B-1D36-470B-8223-D6C91242EC14}" type="datetimeFigureOut">
               <a:rPr lang="en-US" smtClean="0"/>
               <a:pPr/>
-              <a:t>12/19/2025</a:t>
+              <a:t>12/20/2025</a:t>
             </a:fld>
             <a:endParaRPr lang="en-US" dirty="0"/>
           </a:p>
@@ -479,7 +479,7 @@
     </p:spTree>
     <p:extLst>
       <p:ext uri="{BB962C8B-B14F-4D97-AF65-F5344CB8AC3E}">
-        <p14:creationId xmlns:p14="http://schemas.microsoft.com/office/powerpoint/2010/main" val="1387977912"/>
+        <p14:creationId xmlns="" xmlns:p14="http://schemas.microsoft.com/office/powerpoint/2010/main" val="1387977912"/>
       </p:ext>
     </p:extLst>
   </p:cSld>
@@ -607,7 +607,7 @@
             <a:fld id="{67C6F52A-A82B-47A2-A83A-8C4C91F2D59F}" type="datetimeFigureOut">
               <a:rPr lang="en-US" smtClean="0"/>
               <a:pPr/>
-              <a:t>12/19/2025</a:t>
+              <a:t>12/20/2025</a:t>
             </a:fld>
             <a:endParaRPr lang="en-US" dirty="0"/>
           </a:p>
@@ -659,7 +659,7 @@
     </p:spTree>
     <p:extLst>
       <p:ext uri="{BB962C8B-B14F-4D97-AF65-F5344CB8AC3E}">
-        <p14:creationId xmlns:p14="http://schemas.microsoft.com/office/powerpoint/2010/main" val="570333275"/>
+        <p14:creationId xmlns="" xmlns:p14="http://schemas.microsoft.com/office/powerpoint/2010/main" val="570333275"/>
       </p:ext>
     </p:extLst>
   </p:cSld>
@@ -777,7 +777,7 @@
             <a:fld id="{F070A7B3-6521-4DCA-87E5-044747A908C1}" type="datetimeFigureOut">
               <a:rPr lang="en-US" smtClean="0"/>
               <a:pPr/>
-              <a:t>12/19/2025</a:t>
+              <a:t>12/20/2025</a:t>
             </a:fld>
             <a:endParaRPr lang="en-US" dirty="0"/>
           </a:p>
@@ -829,7 +829,7 @@
     </p:spTree>
     <p:extLst>
       <p:ext uri="{BB962C8B-B14F-4D97-AF65-F5344CB8AC3E}">
-        <p14:creationId xmlns:p14="http://schemas.microsoft.com/office/powerpoint/2010/main" val="4186622974"/>
+        <p14:creationId xmlns="" xmlns:p14="http://schemas.microsoft.com/office/powerpoint/2010/main" val="4186622974"/>
       </p:ext>
     </p:extLst>
   </p:cSld>
@@ -1024,7 +1024,7 @@
             <a:fld id="{1160EA64-D806-43AC-9DF2-F8C432F32B4C}" type="datetimeFigureOut">
               <a:rPr lang="en-US" smtClean="0"/>
               <a:pPr/>
-              <a:t>12/19/2025</a:t>
+              <a:t>12/20/2025</a:t>
             </a:fld>
             <a:endParaRPr lang="en-US" dirty="0"/>
           </a:p>
@@ -1076,7 +1076,7 @@
     </p:spTree>
     <p:extLst>
       <p:ext uri="{BB962C8B-B14F-4D97-AF65-F5344CB8AC3E}">
-        <p14:creationId xmlns:p14="http://schemas.microsoft.com/office/powerpoint/2010/main" val="2255896077"/>
+        <p14:creationId xmlns="" xmlns:p14="http://schemas.microsoft.com/office/powerpoint/2010/main" val="2255896077"/>
       </p:ext>
     </p:extLst>
   </p:cSld>
@@ -1255,7 +1255,7 @@
             <a:fld id="{AB134690-1557-4C89-A502-4959FE7FAD70}" type="datetimeFigureOut">
               <a:rPr lang="en-US" smtClean="0"/>
               <a:pPr/>
-              <a:t>12/19/2025</a:t>
+              <a:t>12/20/2025</a:t>
             </a:fld>
             <a:endParaRPr lang="en-US" dirty="0"/>
           </a:p>
@@ -1307,7 +1307,7 @@
     </p:spTree>
     <p:extLst>
       <p:ext uri="{BB962C8B-B14F-4D97-AF65-F5344CB8AC3E}">
-        <p14:creationId xmlns:p14="http://schemas.microsoft.com/office/powerpoint/2010/main" val="399975098"/>
+        <p14:creationId xmlns="" xmlns:p14="http://schemas.microsoft.com/office/powerpoint/2010/main" val="399975098"/>
       </p:ext>
     </p:extLst>
   </p:cSld>
@@ -1316,7 +1316,7 @@
   </p:clrMapOvr>
   <p:extLst>
     <p:ext uri="{DCECCB84-F9BA-43D5-87BE-67443E8EF086}">
-      <p15:sldGuideLst xmlns:p15="http://schemas.microsoft.com/office/powerpoint/2012/main"/>
+      <p15:sldGuideLst xmlns="" xmlns:p15="http://schemas.microsoft.com/office/powerpoint/2012/main"/>
     </p:ext>
   </p:extLst>
 </p:sldLayout>
@@ -1626,7 +1626,7 @@
             <a:fld id="{4F7D4976-E339-4826-83B7-FBD03F55ECF8}" type="datetimeFigureOut">
               <a:rPr lang="en-US" smtClean="0"/>
               <a:pPr/>
-              <a:t>12/19/2025</a:t>
+              <a:t>12/20/2025</a:t>
             </a:fld>
             <a:endParaRPr lang="en-US" dirty="0"/>
           </a:p>
@@ -1678,7 +1678,7 @@
     </p:spTree>
     <p:extLst>
       <p:ext uri="{BB962C8B-B14F-4D97-AF65-F5344CB8AC3E}">
-        <p14:creationId xmlns:p14="http://schemas.microsoft.com/office/powerpoint/2010/main" val="3691994714"/>
+        <p14:creationId xmlns="" xmlns:p14="http://schemas.microsoft.com/office/powerpoint/2010/main" val="3691994714"/>
       </p:ext>
     </p:extLst>
   </p:cSld>
@@ -1687,7 +1687,7 @@
   </p:clrMapOvr>
   <p:extLst>
     <p:ext uri="{DCECCB84-F9BA-43D5-87BE-67443E8EF086}">
-      <p15:sldGuideLst xmlns:p15="http://schemas.microsoft.com/office/powerpoint/2012/main"/>
+      <p15:sldGuideLst xmlns="" xmlns:p15="http://schemas.microsoft.com/office/powerpoint/2012/main"/>
     </p:ext>
   </p:extLst>
 </p:sldLayout>
@@ -1750,7 +1750,7 @@
             <a:fld id="{E1037C31-9E7A-4F99-8774-A0E530DE1A42}" type="datetimeFigureOut">
               <a:rPr lang="en-US" smtClean="0"/>
               <a:pPr/>
-              <a:t>12/19/2025</a:t>
+              <a:t>12/20/2025</a:t>
             </a:fld>
             <a:endParaRPr lang="en-US" dirty="0"/>
           </a:p>
@@ -1802,7 +1802,7 @@
     </p:spTree>
     <p:extLst>
       <p:ext uri="{BB962C8B-B14F-4D97-AF65-F5344CB8AC3E}">
-        <p14:creationId xmlns:p14="http://schemas.microsoft.com/office/powerpoint/2010/main" val="409742779"/>
+        <p14:creationId xmlns="" xmlns:p14="http://schemas.microsoft.com/office/powerpoint/2010/main" val="409742779"/>
       </p:ext>
     </p:extLst>
   </p:cSld>
@@ -1847,7 +1847,7 @@
             <a:fld id="{C278504F-A551-4DE0-9316-4DCD1D8CC752}" type="datetimeFigureOut">
               <a:rPr lang="en-US" smtClean="0"/>
               <a:pPr/>
-              <a:t>12/19/2025</a:t>
+              <a:t>12/20/2025</a:t>
             </a:fld>
             <a:endParaRPr lang="en-US" dirty="0"/>
           </a:p>
@@ -1899,7 +1899,7 @@
     </p:spTree>
     <p:extLst>
       <p:ext uri="{BB962C8B-B14F-4D97-AF65-F5344CB8AC3E}">
-        <p14:creationId xmlns:p14="http://schemas.microsoft.com/office/powerpoint/2010/main" val="540944781"/>
+        <p14:creationId xmlns="" xmlns:p14="http://schemas.microsoft.com/office/powerpoint/2010/main" val="540944781"/>
       </p:ext>
     </p:extLst>
   </p:cSld>
@@ -2124,7 +2124,7 @@
             <a:fld id="{1160EA64-D806-43AC-9DF2-F8C432F32B4C}" type="datetimeFigureOut">
               <a:rPr lang="en-US" smtClean="0"/>
               <a:pPr/>
-              <a:t>12/19/2025</a:t>
+              <a:t>12/20/2025</a:t>
             </a:fld>
             <a:endParaRPr lang="en-US" dirty="0"/>
           </a:p>
@@ -2176,7 +2176,7 @@
     </p:spTree>
     <p:extLst>
       <p:ext uri="{BB962C8B-B14F-4D97-AF65-F5344CB8AC3E}">
-        <p14:creationId xmlns:p14="http://schemas.microsoft.com/office/powerpoint/2010/main" val="1015439884"/>
+        <p14:creationId xmlns="" xmlns:p14="http://schemas.microsoft.com/office/powerpoint/2010/main" val="1015439884"/>
       </p:ext>
     </p:extLst>
   </p:cSld>
@@ -2185,7 +2185,7 @@
   </p:clrMapOvr>
   <p:extLst>
     <p:ext uri="{DCECCB84-F9BA-43D5-87BE-67443E8EF086}">
-      <p15:sldGuideLst xmlns:p15="http://schemas.microsoft.com/office/powerpoint/2012/main"/>
+      <p15:sldGuideLst xmlns="" xmlns:p15="http://schemas.microsoft.com/office/powerpoint/2012/main"/>
     </p:ext>
   </p:extLst>
 </p:sldLayout>
@@ -2383,7 +2383,7 @@
             <a:fld id="{1160EA64-D806-43AC-9DF2-F8C432F32B4C}" type="datetimeFigureOut">
               <a:rPr lang="en-US" smtClean="0"/>
               <a:pPr/>
-              <a:t>12/19/2025</a:t>
+              <a:t>12/20/2025</a:t>
             </a:fld>
             <a:endParaRPr lang="en-US" dirty="0"/>
           </a:p>
@@ -2435,7 +2435,7 @@
     </p:spTree>
     <p:extLst>
       <p:ext uri="{BB962C8B-B14F-4D97-AF65-F5344CB8AC3E}">
-        <p14:creationId xmlns:p14="http://schemas.microsoft.com/office/powerpoint/2010/main" val="1349152458"/>
+        <p14:creationId xmlns="" xmlns:p14="http://schemas.microsoft.com/office/powerpoint/2010/main" val="1349152458"/>
       </p:ext>
     </p:extLst>
   </p:cSld>
@@ -2596,7 +2596,7 @@
             <a:fld id="{1160EA64-D806-43AC-9DF2-F8C432F32B4C}" type="datetimeFigureOut">
               <a:rPr lang="en-US" smtClean="0"/>
               <a:pPr/>
-              <a:t>12/19/2025</a:t>
+              <a:t>12/20/2025</a:t>
             </a:fld>
             <a:endParaRPr lang="en-US" dirty="0"/>
           </a:p>
@@ -2684,7 +2684,7 @@
     </p:spTree>
     <p:extLst>
       <p:ext uri="{BB962C8B-B14F-4D97-AF65-F5344CB8AC3E}">
-        <p14:creationId xmlns:p14="http://schemas.microsoft.com/office/powerpoint/2010/main" val="1105851826"/>
+        <p14:creationId xmlns="" xmlns:p14="http://schemas.microsoft.com/office/powerpoint/2010/main" val="1105851826"/>
       </p:ext>
     </p:extLst>
   </p:cSld>
@@ -2985,7 +2985,7 @@
   </p:txStyles>
   <p:extLst>
     <p:ext uri="{27BBF7A9-308A-43DC-89C8-2F10F3537804}">
-      <p15:sldGuideLst xmlns:p15="http://schemas.microsoft.com/office/powerpoint/2012/main"/>
+      <p15:sldGuideLst xmlns="" xmlns:p15="http://schemas.microsoft.com/office/powerpoint/2012/main"/>
     </p:ext>
   </p:extLst>
 </p:sldMaster>
@@ -3245,7 +3245,7 @@
           <p:cNvPr id="8" name="TextBox 7">
             <a:extLst>
               <a:ext uri="{FF2B5EF4-FFF2-40B4-BE49-F238E27FC236}">
-                <a16:creationId xmlns:a16="http://schemas.microsoft.com/office/drawing/2014/main" id="{617961FB-6351-2BD7-16B8-3B55C0FAE19F}"/>
+                <a16:creationId xmlns="" xmlns:a16="http://schemas.microsoft.com/office/drawing/2014/main" id="{617961FB-6351-2BD7-16B8-3B55C0FAE19F}"/>
               </a:ext>
             </a:extLst>
           </p:cNvPr>
@@ -3333,7 +3333,7 @@
           <p:cNvPr id="12" name="Овал 11">
             <a:extLst>
               <a:ext uri="{FF2B5EF4-FFF2-40B4-BE49-F238E27FC236}">
-                <a16:creationId xmlns:a16="http://schemas.microsoft.com/office/drawing/2014/main" id="{4C62040F-BA6D-56F4-916C-B7FF4CB04D8C}"/>
+                <a16:creationId xmlns="" xmlns:a16="http://schemas.microsoft.com/office/drawing/2014/main" id="{4C62040F-BA6D-56F4-916C-B7FF4CB04D8C}"/>
               </a:ext>
             </a:extLst>
           </p:cNvPr>
@@ -3352,7 +3352,7 @@
             <a:blip r:embed="rId3">
               <a:extLst>
                 <a:ext uri="{28A0092B-C50C-407E-A947-70E740481C1C}">
-                  <a14:useLocalDpi xmlns:a14="http://schemas.microsoft.com/office/drawing/2010/main" val="0"/>
+                  <a14:useLocalDpi xmlns="" xmlns:a14="http://schemas.microsoft.com/office/drawing/2010/main" val="0"/>
                 </a:ext>
               </a:extLst>
             </a:blip>
@@ -3395,7 +3395,7 @@
     </p:spTree>
     <p:extLst>
       <p:ext uri="{BB962C8B-B14F-4D97-AF65-F5344CB8AC3E}">
-        <p14:creationId xmlns:p14="http://schemas.microsoft.com/office/powerpoint/2010/main" val="4290534139"/>
+        <p14:creationId xmlns="" xmlns:p14="http://schemas.microsoft.com/office/powerpoint/2010/main" val="4290534139"/>
       </p:ext>
     </p:extLst>
   </p:cSld>
@@ -3565,7 +3565,7 @@
     </p:spTree>
     <p:extLst>
       <p:ext uri="{BB962C8B-B14F-4D97-AF65-F5344CB8AC3E}">
-        <p14:creationId xmlns:p14="http://schemas.microsoft.com/office/powerpoint/2010/main" val="3950111895"/>
+        <p14:creationId xmlns="" xmlns:p14="http://schemas.microsoft.com/office/powerpoint/2010/main" val="3950111895"/>
       </p:ext>
     </p:extLst>
   </p:cSld>
@@ -3657,7 +3657,7 @@
           <p:cNvPr id="21" name="Рисунок 20">
             <a:extLst>
               <a:ext uri="{FF2B5EF4-FFF2-40B4-BE49-F238E27FC236}">
-                <a16:creationId xmlns:a16="http://schemas.microsoft.com/office/drawing/2014/main" id="{53EF3B6B-FF3A-292F-8210-469CA1F1742E}"/>
+                <a16:creationId xmlns="" xmlns:a16="http://schemas.microsoft.com/office/drawing/2014/main" id="{53EF3B6B-FF3A-292F-8210-469CA1F1742E}"/>
               </a:ext>
             </a:extLst>
           </p:cNvPr>
@@ -3685,7 +3685,7 @@
     </p:spTree>
     <p:extLst>
       <p:ext uri="{BB962C8B-B14F-4D97-AF65-F5344CB8AC3E}">
-        <p14:creationId xmlns:p14="http://schemas.microsoft.com/office/powerpoint/2010/main" val="4265305391"/>
+        <p14:creationId xmlns="" xmlns:p14="http://schemas.microsoft.com/office/powerpoint/2010/main" val="4265305391"/>
       </p:ext>
     </p:extLst>
   </p:cSld>
@@ -3986,7 +3986,7 @@
     </p:spTree>
     <p:extLst>
       <p:ext uri="{BB962C8B-B14F-4D97-AF65-F5344CB8AC3E}">
-        <p14:creationId xmlns:p14="http://schemas.microsoft.com/office/powerpoint/2010/main" val="3352537282"/>
+        <p14:creationId xmlns="" xmlns:p14="http://schemas.microsoft.com/office/powerpoint/2010/main" val="3352537282"/>
       </p:ext>
     </p:extLst>
   </p:cSld>
@@ -4374,10 +4374,10 @@
                 <a:latin typeface="Times New Roman" panose="02020603050405020304" pitchFamily="18" charset="0"/>
                 <a:cs typeface="Times New Roman" panose="02020603050405020304" pitchFamily="18" charset="0"/>
               </a:rPr>
-              <a:t> - конвертер для преобразования JSON-ответов в </a:t>
-            </a:r>
-            <a:r>
-              <a:rPr lang="ru-RU" sz="2000" b="0" i="0" dirty="0" err="1">
+              <a:t> - конвертер для преобразования JSON-ответов в Kotlin-объекты</a:t>
+            </a:r>
+            <a:r>
+              <a:rPr lang="ru-RU" sz="2000" b="0" i="0" dirty="0" smtClean="0">
                 <a:solidFill>
                   <a:srgbClr val="0F1115"/>
                 </a:solidFill>
@@ -4388,118 +4388,19 @@
                 <a:latin typeface="Times New Roman" panose="02020603050405020304" pitchFamily="18" charset="0"/>
                 <a:cs typeface="Times New Roman" panose="02020603050405020304" pitchFamily="18" charset="0"/>
               </a:rPr>
-              <a:t>Kotlin</a:t>
-            </a:r>
-            <a:r>
-              <a:rPr lang="ru-RU" sz="2000" b="0" i="0" dirty="0">
-                <a:solidFill>
-                  <a:srgbClr val="0F1115"/>
-                </a:solidFill>
-                <a:effectLst/>
-                <a:highlight>
-                  <a:srgbClr val="FFFFFF"/>
-                </a:highlight>
-                <a:latin typeface="Times New Roman" panose="02020603050405020304" pitchFamily="18" charset="0"/>
-                <a:cs typeface="Times New Roman" panose="02020603050405020304" pitchFamily="18" charset="0"/>
-              </a:rPr>
-              <a:t>-объекты.</a:t>
-            </a:r>
-          </a:p>
-          <a:p>
-            <a:pPr algn="just">
-              <a:buFont typeface="+mj-lt"/>
-              <a:buAutoNum type="arabicPeriod"/>
-            </a:pPr>
-            <a:r>
-              <a:rPr lang="ru-RU" sz="2000" b="1" i="0" dirty="0" err="1">
-                <a:solidFill>
-                  <a:srgbClr val="0F1115"/>
-                </a:solidFill>
-                <a:effectLst/>
-                <a:highlight>
-                  <a:srgbClr val="FFFFFF"/>
-                </a:highlight>
-                <a:latin typeface="Times New Roman" panose="02020603050405020304" pitchFamily="18" charset="0"/>
-                <a:cs typeface="Times New Roman" panose="02020603050405020304" pitchFamily="18" charset="0"/>
-              </a:rPr>
-              <a:t>Room</a:t>
-            </a:r>
-            <a:r>
-              <a:rPr lang="ru-RU" sz="2000" b="0" i="0" dirty="0">
-                <a:solidFill>
-                  <a:srgbClr val="0F1115"/>
-                </a:solidFill>
-                <a:effectLst/>
-                <a:highlight>
-                  <a:srgbClr val="FFFFFF"/>
-                </a:highlight>
-                <a:latin typeface="Times New Roman" panose="02020603050405020304" pitchFamily="18" charset="0"/>
-                <a:cs typeface="Times New Roman" panose="02020603050405020304" pitchFamily="18" charset="0"/>
-              </a:rPr>
-              <a:t> - библиотека для работы с локальной SQL базой данных.</a:t>
-            </a:r>
-          </a:p>
-          <a:p>
-            <a:pPr algn="just">
-              <a:buFont typeface="+mj-lt"/>
-              <a:buAutoNum type="arabicPeriod"/>
-            </a:pPr>
-            <a:r>
-              <a:rPr lang="ru-RU" sz="2000" b="1" i="0" dirty="0" err="1">
-                <a:solidFill>
-                  <a:srgbClr val="0F1115"/>
-                </a:solidFill>
-                <a:effectLst/>
-                <a:highlight>
-                  <a:srgbClr val="FFFFFF"/>
-                </a:highlight>
-                <a:latin typeface="Times New Roman" panose="02020603050405020304" pitchFamily="18" charset="0"/>
-                <a:cs typeface="Times New Roman" panose="02020603050405020304" pitchFamily="18" charset="0"/>
-              </a:rPr>
-              <a:t>Coroutines</a:t>
-            </a:r>
-            <a:r>
-              <a:rPr lang="ru-RU" sz="2000" b="0" i="0" dirty="0">
-                <a:solidFill>
-                  <a:srgbClr val="0F1115"/>
-                </a:solidFill>
-                <a:effectLst/>
-                <a:highlight>
-                  <a:srgbClr val="FFFFFF"/>
-                </a:highlight>
-                <a:latin typeface="Times New Roman" panose="02020603050405020304" pitchFamily="18" charset="0"/>
-                <a:cs typeface="Times New Roman" panose="02020603050405020304" pitchFamily="18" charset="0"/>
-              </a:rPr>
-              <a:t> - встроенная в </a:t>
-            </a:r>
-            <a:r>
-              <a:rPr lang="ru-RU" sz="2000" b="0" i="0" dirty="0" err="1">
-                <a:solidFill>
-                  <a:srgbClr val="0F1115"/>
-                </a:solidFill>
-                <a:effectLst/>
-                <a:highlight>
-                  <a:srgbClr val="FFFFFF"/>
-                </a:highlight>
-                <a:latin typeface="Times New Roman" panose="02020603050405020304" pitchFamily="18" charset="0"/>
-                <a:cs typeface="Times New Roman" panose="02020603050405020304" pitchFamily="18" charset="0"/>
-              </a:rPr>
-              <a:t>Kotlin</a:t>
-            </a:r>
-            <a:r>
-              <a:rPr lang="ru-RU" sz="2000" b="0" i="0" dirty="0">
-                <a:solidFill>
-                  <a:srgbClr val="0F1115"/>
-                </a:solidFill>
-                <a:effectLst/>
-                <a:highlight>
-                  <a:srgbClr val="FFFFFF"/>
-                </a:highlight>
-                <a:latin typeface="Times New Roman" panose="02020603050405020304" pitchFamily="18" charset="0"/>
-                <a:cs typeface="Times New Roman" panose="02020603050405020304" pitchFamily="18" charset="0"/>
-              </a:rPr>
-              <a:t> библиотека для асинхронного программирования.</a:t>
-            </a:r>
+              <a:t>.</a:t>
+            </a:r>
+            <a:endParaRPr lang="ru-RU" sz="2000" b="0" i="0" dirty="0">
+              <a:solidFill>
+                <a:srgbClr val="0F1115"/>
+              </a:solidFill>
+              <a:effectLst/>
+              <a:highlight>
+                <a:srgbClr val="FFFFFF"/>
+              </a:highlight>
+              <a:latin typeface="Times New Roman" panose="02020603050405020304" pitchFamily="18" charset="0"/>
+              <a:cs typeface="Times New Roman" panose="02020603050405020304" pitchFamily="18" charset="0"/>
+            </a:endParaRPr>
           </a:p>
           <a:p>
             <a:pPr algn="just">
@@ -4592,6 +4493,7 @@
               <a:spcBef>
                 <a:spcPts val="0"/>
               </a:spcBef>
+              <a:buNone/>
             </a:pPr>
             <a:endParaRPr lang="ru-RU" sz="2400" dirty="0">
               <a:latin typeface="Times New Roman" panose="02020603050405020304" pitchFamily="18" charset="0"/>
@@ -4603,7 +4505,7 @@
     </p:spTree>
     <p:extLst>
       <p:ext uri="{BB962C8B-B14F-4D97-AF65-F5344CB8AC3E}">
-        <p14:creationId xmlns:p14="http://schemas.microsoft.com/office/powerpoint/2010/main" val="4015143808"/>
+        <p14:creationId xmlns="" xmlns:p14="http://schemas.microsoft.com/office/powerpoint/2010/main" val="4015143808"/>
       </p:ext>
     </p:extLst>
   </p:cSld>
@@ -4868,7 +4770,7 @@
   <a:extraClrSchemeLst/>
   <a:extLst>
     <a:ext uri="{05A4C25C-085E-4340-85A3-A5531E510DB2}">
-      <thm15:themeFamily xmlns:thm15="http://schemas.microsoft.com/office/thememl/2012/main" name="Office Theme" id="{62F939B6-93AF-4DB8-9C6B-D6C7DFDC589F}" vid="{4A3C46E8-61CC-4603-A589-7422A47A8E4A}"/>
+      <thm15:themeFamily xmlns="" xmlns:thm15="http://schemas.microsoft.com/office/thememl/2012/main" name="Office Theme" id="{62F939B6-93AF-4DB8-9C6B-D6C7DFDC589F}" vid="{4A3C46E8-61CC-4603-A589-7422A47A8E4A}"/>
     </a:ext>
   </a:extLst>
 </a:theme>
